--- a/public/fun/pack/pptx/birthday/돌잔치_02_돌잡이중심_입춘날마루.pptx
+++ b/public/fun/pack/pptx/birthday/돌잔치_02_돌잡이중심_입춘날마루.pptx
@@ -3347,7 +3347,7 @@
             <a:r>
               <a:rPr sz="4000" b="1" i="0">
                 <a:solidFill>
-                  <a:srgbClr val="74591B"/>
+                  <a:srgbClr val="72591D"/>
                 </a:solidFill>
               </a:rPr>
               <a:t>첫 번째 생일</a:t>
@@ -3385,7 +3385,7 @@
             <a:r>
               <a:rPr sz="1700" b="0" i="1">
                 <a:solidFill>
-                  <a:srgbClr val="74591B"/>
+                  <a:srgbClr val="72591D"/>
                 </a:solidFill>
               </a:rPr>
               <a:t>연필을 잡을까, 실을 잡을까</a:t>
@@ -3460,7 +3460,7 @@
     <p:bg>
       <p:bgPr>
         <a:solidFill>
-          <a:srgbClr val="FBF7EE"/>
+          <a:srgbClr val="FCF9F3"/>
         </a:solidFill>
         <a:effectLst/>
       </p:bgPr>
@@ -3489,7 +3489,7 @@
           <a:noFill/>
           <a:ln w="28575">
             <a:solidFill>
-              <a:srgbClr val="C6992F"/>
+              <a:srgbClr val="DFAD3A"/>
             </a:solidFill>
           </a:ln>
         </p:spPr>
@@ -3518,7 +3518,7 @@
           <a:noFill/>
           <a:ln w="9525">
             <a:solidFill>
-              <a:srgbClr val="F5E9CC"/>
+              <a:srgbClr val="F7EDD4"/>
             </a:solidFill>
           </a:ln>
         </p:spPr>
@@ -3560,7 +3560,7 @@
             <a:r>
               <a:rPr sz="3000" b="1" i="0">
                 <a:solidFill>
-                  <a:srgbClr val="74591B"/>
+                  <a:srgbClr val="72591D"/>
                 </a:solidFill>
               </a:rPr>
               <a:t>우리 아기를 소개합니다</a:t>
@@ -3585,11 +3585,11 @@
             </a:avLst>
           </a:prstGeom>
           <a:solidFill>
-            <a:srgbClr val="F5E9CC"/>
+            <a:srgbClr val="F7EDD4"/>
           </a:solidFill>
           <a:ln w="19050">
             <a:solidFill>
-              <a:srgbClr val="C6992F"/>
+              <a:srgbClr val="DFAD3A"/>
             </a:solidFill>
             <a:prstDash val="dash"/>
           </a:ln>
@@ -3608,7 +3608,7 @@
             <a:r>
               <a:rPr sz="1400" b="0" i="0">
                 <a:solidFill>
-                  <a:srgbClr val="74591B"/>
+                  <a:srgbClr val="72591D"/>
                 </a:solidFill>
               </a:rPr>
               <a:t>아기 사진을 넣어 주세요</a:t>
@@ -3648,7 +3648,7 @@
                       <a:r>
                         <a:rPr sz="1500" b="1">
                           <a:solidFill>
-                            <a:srgbClr val="74591B"/>
+                            <a:srgbClr val="72591D"/>
                           </a:solidFill>
                         </a:rPr>
                         <a:t>이름</a:t>
@@ -3658,30 +3658,30 @@
                   <a:tcPr anchor="ctr" marL="73152" marR="73152">
                     <a:lnL w="9525" cap="flat" cmpd="sng" algn="ctr">
                       <a:solidFill>
-                        <a:srgbClr val="F5E9CC"/>
+                        <a:srgbClr val="F7EDD4"/>
                       </a:solidFill>
                       <a:prstDash val="solid"/>
                     </a:lnL>
                     <a:lnR w="9525" cap="flat" cmpd="sng" algn="ctr">
                       <a:solidFill>
-                        <a:srgbClr val="F5E9CC"/>
+                        <a:srgbClr val="F7EDD4"/>
                       </a:solidFill>
                       <a:prstDash val="solid"/>
                     </a:lnR>
                     <a:lnT w="9525" cap="flat" cmpd="sng" algn="ctr">
                       <a:solidFill>
-                        <a:srgbClr val="F5E9CC"/>
+                        <a:srgbClr val="F7EDD4"/>
                       </a:solidFill>
                       <a:prstDash val="solid"/>
                     </a:lnT>
                     <a:lnB w="9525" cap="flat" cmpd="sng" algn="ctr">
                       <a:solidFill>
-                        <a:srgbClr val="F5E9CC"/>
+                        <a:srgbClr val="F7EDD4"/>
                       </a:solidFill>
                       <a:prstDash val="solid"/>
                     </a:lnB>
                     <a:solidFill>
-                      <a:srgbClr val="F5E9CC"/>
+                      <a:srgbClr val="F7EDD4"/>
                     </a:solidFill>
                   </a:tcPr>
                 </a:tc>
@@ -3704,30 +3704,30 @@
                   <a:tcPr anchor="ctr" marL="73152" marR="73152">
                     <a:lnL w="9525" cap="flat" cmpd="sng" algn="ctr">
                       <a:solidFill>
-                        <a:srgbClr val="F5E9CC"/>
+                        <a:srgbClr val="F7EDD4"/>
                       </a:solidFill>
                       <a:prstDash val="solid"/>
                     </a:lnL>
                     <a:lnR w="9525" cap="flat" cmpd="sng" algn="ctr">
                       <a:solidFill>
-                        <a:srgbClr val="F5E9CC"/>
+                        <a:srgbClr val="F7EDD4"/>
                       </a:solidFill>
                       <a:prstDash val="solid"/>
                     </a:lnR>
                     <a:lnT w="9525" cap="flat" cmpd="sng" algn="ctr">
                       <a:solidFill>
-                        <a:srgbClr val="F5E9CC"/>
+                        <a:srgbClr val="F7EDD4"/>
                       </a:solidFill>
                       <a:prstDash val="solid"/>
                     </a:lnT>
                     <a:lnB w="9525" cap="flat" cmpd="sng" algn="ctr">
                       <a:solidFill>
-                        <a:srgbClr val="F5E9CC"/>
+                        <a:srgbClr val="F7EDD4"/>
                       </a:solidFill>
                       <a:prstDash val="solid"/>
                     </a:lnB>
                     <a:solidFill>
-                      <a:srgbClr val="FBF7EE"/>
+                      <a:srgbClr val="FCF9F3"/>
                     </a:solidFill>
                   </a:tcPr>
                 </a:tc>
@@ -3742,7 +3742,7 @@
                       <a:r>
                         <a:rPr sz="1500" b="1">
                           <a:solidFill>
-                            <a:srgbClr val="74591B"/>
+                            <a:srgbClr val="72591D"/>
                           </a:solidFill>
                         </a:rPr>
                         <a:t>생일</a:t>
@@ -3752,30 +3752,30 @@
                   <a:tcPr anchor="ctr" marL="73152" marR="73152">
                     <a:lnL w="9525" cap="flat" cmpd="sng" algn="ctr">
                       <a:solidFill>
-                        <a:srgbClr val="F5E9CC"/>
+                        <a:srgbClr val="F7EDD4"/>
                       </a:solidFill>
                       <a:prstDash val="solid"/>
                     </a:lnL>
                     <a:lnR w="9525" cap="flat" cmpd="sng" algn="ctr">
                       <a:solidFill>
-                        <a:srgbClr val="F5E9CC"/>
+                        <a:srgbClr val="F7EDD4"/>
                       </a:solidFill>
                       <a:prstDash val="solid"/>
                     </a:lnR>
                     <a:lnT w="9525" cap="flat" cmpd="sng" algn="ctr">
                       <a:solidFill>
-                        <a:srgbClr val="F5E9CC"/>
+                        <a:srgbClr val="F7EDD4"/>
                       </a:solidFill>
                       <a:prstDash val="solid"/>
                     </a:lnT>
                     <a:lnB w="9525" cap="flat" cmpd="sng" algn="ctr">
                       <a:solidFill>
-                        <a:srgbClr val="F5E9CC"/>
+                        <a:srgbClr val="F7EDD4"/>
                       </a:solidFill>
                       <a:prstDash val="solid"/>
                     </a:lnB>
                     <a:solidFill>
-                      <a:srgbClr val="F5E9CC"/>
+                      <a:srgbClr val="F7EDD4"/>
                     </a:solidFill>
                   </a:tcPr>
                 </a:tc>
@@ -3798,25 +3798,25 @@
                   <a:tcPr anchor="ctr" marL="73152" marR="73152">
                     <a:lnL w="9525" cap="flat" cmpd="sng" algn="ctr">
                       <a:solidFill>
-                        <a:srgbClr val="F5E9CC"/>
+                        <a:srgbClr val="F7EDD4"/>
                       </a:solidFill>
                       <a:prstDash val="solid"/>
                     </a:lnL>
                     <a:lnR w="9525" cap="flat" cmpd="sng" algn="ctr">
                       <a:solidFill>
-                        <a:srgbClr val="F5E9CC"/>
+                        <a:srgbClr val="F7EDD4"/>
                       </a:solidFill>
                       <a:prstDash val="solid"/>
                     </a:lnR>
                     <a:lnT w="9525" cap="flat" cmpd="sng" algn="ctr">
                       <a:solidFill>
-                        <a:srgbClr val="F5E9CC"/>
+                        <a:srgbClr val="F7EDD4"/>
                       </a:solidFill>
                       <a:prstDash val="solid"/>
                     </a:lnT>
                     <a:lnB w="9525" cap="flat" cmpd="sng" algn="ctr">
                       <a:solidFill>
-                        <a:srgbClr val="F5E9CC"/>
+                        <a:srgbClr val="F7EDD4"/>
                       </a:solidFill>
                       <a:prstDash val="solid"/>
                     </a:lnB>
@@ -3836,7 +3836,7 @@
                       <a:r>
                         <a:rPr sz="1500" b="1">
                           <a:solidFill>
-                            <a:srgbClr val="74591B"/>
+                            <a:srgbClr val="72591D"/>
                           </a:solidFill>
                         </a:rPr>
                         <a:t>키 · 몸무게</a:t>
@@ -3846,30 +3846,30 @@
                   <a:tcPr anchor="ctr" marL="73152" marR="73152">
                     <a:lnL w="9525" cap="flat" cmpd="sng" algn="ctr">
                       <a:solidFill>
-                        <a:srgbClr val="F5E9CC"/>
+                        <a:srgbClr val="F7EDD4"/>
                       </a:solidFill>
                       <a:prstDash val="solid"/>
                     </a:lnL>
                     <a:lnR w="9525" cap="flat" cmpd="sng" algn="ctr">
                       <a:solidFill>
-                        <a:srgbClr val="F5E9CC"/>
+                        <a:srgbClr val="F7EDD4"/>
                       </a:solidFill>
                       <a:prstDash val="solid"/>
                     </a:lnR>
                     <a:lnT w="9525" cap="flat" cmpd="sng" algn="ctr">
                       <a:solidFill>
-                        <a:srgbClr val="F5E9CC"/>
+                        <a:srgbClr val="F7EDD4"/>
                       </a:solidFill>
                       <a:prstDash val="solid"/>
                     </a:lnT>
                     <a:lnB w="9525" cap="flat" cmpd="sng" algn="ctr">
                       <a:solidFill>
-                        <a:srgbClr val="F5E9CC"/>
+                        <a:srgbClr val="F7EDD4"/>
                       </a:solidFill>
                       <a:prstDash val="solid"/>
                     </a:lnB>
                     <a:solidFill>
-                      <a:srgbClr val="F5E9CC"/>
+                      <a:srgbClr val="F7EDD4"/>
                     </a:solidFill>
                   </a:tcPr>
                 </a:tc>
@@ -3892,30 +3892,30 @@
                   <a:tcPr anchor="ctr" marL="73152" marR="73152">
                     <a:lnL w="9525" cap="flat" cmpd="sng" algn="ctr">
                       <a:solidFill>
-                        <a:srgbClr val="F5E9CC"/>
+                        <a:srgbClr val="F7EDD4"/>
                       </a:solidFill>
                       <a:prstDash val="solid"/>
                     </a:lnL>
                     <a:lnR w="9525" cap="flat" cmpd="sng" algn="ctr">
                       <a:solidFill>
-                        <a:srgbClr val="F5E9CC"/>
+                        <a:srgbClr val="F7EDD4"/>
                       </a:solidFill>
                       <a:prstDash val="solid"/>
                     </a:lnR>
                     <a:lnT w="9525" cap="flat" cmpd="sng" algn="ctr">
                       <a:solidFill>
-                        <a:srgbClr val="F5E9CC"/>
+                        <a:srgbClr val="F7EDD4"/>
                       </a:solidFill>
                       <a:prstDash val="solid"/>
                     </a:lnT>
                     <a:lnB w="9525" cap="flat" cmpd="sng" algn="ctr">
                       <a:solidFill>
-                        <a:srgbClr val="F5E9CC"/>
+                        <a:srgbClr val="F7EDD4"/>
                       </a:solidFill>
                       <a:prstDash val="solid"/>
                     </a:lnB>
                     <a:solidFill>
-                      <a:srgbClr val="FBF7EE"/>
+                      <a:srgbClr val="FCF9F3"/>
                     </a:solidFill>
                   </a:tcPr>
                 </a:tc>
@@ -3930,7 +3930,7 @@
                       <a:r>
                         <a:rPr sz="1500" b="1">
                           <a:solidFill>
-                            <a:srgbClr val="74591B"/>
+                            <a:srgbClr val="72591D"/>
                           </a:solidFill>
                         </a:rPr>
                         <a:t>좋아하는 것</a:t>
@@ -3940,30 +3940,30 @@
                   <a:tcPr anchor="ctr" marL="73152" marR="73152">
                     <a:lnL w="9525" cap="flat" cmpd="sng" algn="ctr">
                       <a:solidFill>
-                        <a:srgbClr val="F5E9CC"/>
+                        <a:srgbClr val="F7EDD4"/>
                       </a:solidFill>
                       <a:prstDash val="solid"/>
                     </a:lnL>
                     <a:lnR w="9525" cap="flat" cmpd="sng" algn="ctr">
                       <a:solidFill>
-                        <a:srgbClr val="F5E9CC"/>
+                        <a:srgbClr val="F7EDD4"/>
                       </a:solidFill>
                       <a:prstDash val="solid"/>
                     </a:lnR>
                     <a:lnT w="9525" cap="flat" cmpd="sng" algn="ctr">
                       <a:solidFill>
-                        <a:srgbClr val="F5E9CC"/>
+                        <a:srgbClr val="F7EDD4"/>
                       </a:solidFill>
                       <a:prstDash val="solid"/>
                     </a:lnT>
                     <a:lnB w="9525" cap="flat" cmpd="sng" algn="ctr">
                       <a:solidFill>
-                        <a:srgbClr val="F5E9CC"/>
+                        <a:srgbClr val="F7EDD4"/>
                       </a:solidFill>
                       <a:prstDash val="solid"/>
                     </a:lnB>
                     <a:solidFill>
-                      <a:srgbClr val="F5E9CC"/>
+                      <a:srgbClr val="F7EDD4"/>
                     </a:solidFill>
                   </a:tcPr>
                 </a:tc>
@@ -3986,25 +3986,25 @@
                   <a:tcPr anchor="ctr" marL="73152" marR="73152">
                     <a:lnL w="9525" cap="flat" cmpd="sng" algn="ctr">
                       <a:solidFill>
-                        <a:srgbClr val="F5E9CC"/>
+                        <a:srgbClr val="F7EDD4"/>
                       </a:solidFill>
                       <a:prstDash val="solid"/>
                     </a:lnL>
                     <a:lnR w="9525" cap="flat" cmpd="sng" algn="ctr">
                       <a:solidFill>
-                        <a:srgbClr val="F5E9CC"/>
+                        <a:srgbClr val="F7EDD4"/>
                       </a:solidFill>
                       <a:prstDash val="solid"/>
                     </a:lnR>
                     <a:lnT w="9525" cap="flat" cmpd="sng" algn="ctr">
                       <a:solidFill>
-                        <a:srgbClr val="F5E9CC"/>
+                        <a:srgbClr val="F7EDD4"/>
                       </a:solidFill>
                       <a:prstDash val="solid"/>
                     </a:lnT>
                     <a:lnB w="9525" cap="flat" cmpd="sng" algn="ctr">
                       <a:solidFill>
-                        <a:srgbClr val="F5E9CC"/>
+                        <a:srgbClr val="F7EDD4"/>
                       </a:solidFill>
                       <a:prstDash val="solid"/>
                     </a:lnB>
@@ -4024,7 +4024,7 @@
                       <a:r>
                         <a:rPr sz="1500" b="1">
                           <a:solidFill>
-                            <a:srgbClr val="74591B"/>
+                            <a:srgbClr val="72591D"/>
                           </a:solidFill>
                         </a:rPr>
                         <a:t>별명</a:t>
@@ -4034,30 +4034,30 @@
                   <a:tcPr anchor="ctr" marL="73152" marR="73152">
                     <a:lnL w="9525" cap="flat" cmpd="sng" algn="ctr">
                       <a:solidFill>
-                        <a:srgbClr val="F5E9CC"/>
+                        <a:srgbClr val="F7EDD4"/>
                       </a:solidFill>
                       <a:prstDash val="solid"/>
                     </a:lnL>
                     <a:lnR w="9525" cap="flat" cmpd="sng" algn="ctr">
                       <a:solidFill>
-                        <a:srgbClr val="F5E9CC"/>
+                        <a:srgbClr val="F7EDD4"/>
                       </a:solidFill>
                       <a:prstDash val="solid"/>
                     </a:lnR>
                     <a:lnT w="9525" cap="flat" cmpd="sng" algn="ctr">
                       <a:solidFill>
-                        <a:srgbClr val="F5E9CC"/>
+                        <a:srgbClr val="F7EDD4"/>
                       </a:solidFill>
                       <a:prstDash val="solid"/>
                     </a:lnT>
                     <a:lnB w="9525" cap="flat" cmpd="sng" algn="ctr">
                       <a:solidFill>
-                        <a:srgbClr val="F5E9CC"/>
+                        <a:srgbClr val="F7EDD4"/>
                       </a:solidFill>
                       <a:prstDash val="solid"/>
                     </a:lnB>
                     <a:solidFill>
-                      <a:srgbClr val="F5E9CC"/>
+                      <a:srgbClr val="F7EDD4"/>
                     </a:solidFill>
                   </a:tcPr>
                 </a:tc>
@@ -4080,30 +4080,30 @@
                   <a:tcPr anchor="ctr" marL="73152" marR="73152">
                     <a:lnL w="9525" cap="flat" cmpd="sng" algn="ctr">
                       <a:solidFill>
-                        <a:srgbClr val="F5E9CC"/>
+                        <a:srgbClr val="F7EDD4"/>
                       </a:solidFill>
                       <a:prstDash val="solid"/>
                     </a:lnL>
                     <a:lnR w="9525" cap="flat" cmpd="sng" algn="ctr">
                       <a:solidFill>
-                        <a:srgbClr val="F5E9CC"/>
+                        <a:srgbClr val="F7EDD4"/>
                       </a:solidFill>
                       <a:prstDash val="solid"/>
                     </a:lnR>
                     <a:lnT w="9525" cap="flat" cmpd="sng" algn="ctr">
                       <a:solidFill>
-                        <a:srgbClr val="F5E9CC"/>
+                        <a:srgbClr val="F7EDD4"/>
                       </a:solidFill>
                       <a:prstDash val="solid"/>
                     </a:lnT>
                     <a:lnB w="9525" cap="flat" cmpd="sng" algn="ctr">
                       <a:solidFill>
-                        <a:srgbClr val="F5E9CC"/>
+                        <a:srgbClr val="F7EDD4"/>
                       </a:solidFill>
                       <a:prstDash val="solid"/>
                     </a:lnB>
                     <a:solidFill>
-                      <a:srgbClr val="FBF7EE"/>
+                      <a:srgbClr val="FCF9F3"/>
                     </a:solidFill>
                   </a:tcPr>
                 </a:tc>
@@ -4118,7 +4118,7 @@
                       <a:r>
                         <a:rPr sz="1500" b="1">
                           <a:solidFill>
-                            <a:srgbClr val="74591B"/>
+                            <a:srgbClr val="72591D"/>
                           </a:solidFill>
                         </a:rPr>
                         <a:t>부모의 마음</a:t>
@@ -4128,30 +4128,30 @@
                   <a:tcPr anchor="ctr" marL="73152" marR="73152">
                     <a:lnL w="9525" cap="flat" cmpd="sng" algn="ctr">
                       <a:solidFill>
-                        <a:srgbClr val="F5E9CC"/>
+                        <a:srgbClr val="F7EDD4"/>
                       </a:solidFill>
                       <a:prstDash val="solid"/>
                     </a:lnL>
                     <a:lnR w="9525" cap="flat" cmpd="sng" algn="ctr">
                       <a:solidFill>
-                        <a:srgbClr val="F5E9CC"/>
+                        <a:srgbClr val="F7EDD4"/>
                       </a:solidFill>
                       <a:prstDash val="solid"/>
                     </a:lnR>
                     <a:lnT w="9525" cap="flat" cmpd="sng" algn="ctr">
                       <a:solidFill>
-                        <a:srgbClr val="F5E9CC"/>
+                        <a:srgbClr val="F7EDD4"/>
                       </a:solidFill>
                       <a:prstDash val="solid"/>
                     </a:lnT>
                     <a:lnB w="9525" cap="flat" cmpd="sng" algn="ctr">
                       <a:solidFill>
-                        <a:srgbClr val="F5E9CC"/>
+                        <a:srgbClr val="F7EDD4"/>
                       </a:solidFill>
                       <a:prstDash val="solid"/>
                     </a:lnB>
                     <a:solidFill>
-                      <a:srgbClr val="F5E9CC"/>
+                      <a:srgbClr val="F7EDD4"/>
                     </a:solidFill>
                   </a:tcPr>
                 </a:tc>
@@ -4174,25 +4174,25 @@
                   <a:tcPr anchor="ctr" marL="73152" marR="73152">
                     <a:lnL w="9525" cap="flat" cmpd="sng" algn="ctr">
                       <a:solidFill>
-                        <a:srgbClr val="F5E9CC"/>
+                        <a:srgbClr val="F7EDD4"/>
                       </a:solidFill>
                       <a:prstDash val="solid"/>
                     </a:lnL>
                     <a:lnR w="9525" cap="flat" cmpd="sng" algn="ctr">
                       <a:solidFill>
-                        <a:srgbClr val="F5E9CC"/>
+                        <a:srgbClr val="F7EDD4"/>
                       </a:solidFill>
                       <a:prstDash val="solid"/>
                     </a:lnR>
                     <a:lnT w="9525" cap="flat" cmpd="sng" algn="ctr">
                       <a:solidFill>
-                        <a:srgbClr val="F5E9CC"/>
+                        <a:srgbClr val="F7EDD4"/>
                       </a:solidFill>
                       <a:prstDash val="solid"/>
                     </a:lnT>
                     <a:lnB w="9525" cap="flat" cmpd="sng" algn="ctr">
                       <a:solidFill>
-                        <a:srgbClr val="F5E9CC"/>
+                        <a:srgbClr val="F7EDD4"/>
                       </a:solidFill>
                       <a:prstDash val="solid"/>
                     </a:lnB>
@@ -4220,7 +4220,7 @@
     <p:bg>
       <p:bgPr>
         <a:solidFill>
-          <a:srgbClr val="FBF7EE"/>
+          <a:srgbClr val="FCF9F3"/>
         </a:solidFill>
         <a:effectLst/>
       </p:bgPr>
@@ -4249,7 +4249,7 @@
           <a:noFill/>
           <a:ln w="28575">
             <a:solidFill>
-              <a:srgbClr val="C6992F"/>
+              <a:srgbClr val="DFAD3A"/>
             </a:solidFill>
           </a:ln>
         </p:spPr>
@@ -4278,7 +4278,7 @@
           <a:noFill/>
           <a:ln w="9525">
             <a:solidFill>
-              <a:srgbClr val="F5E9CC"/>
+              <a:srgbClr val="F7EDD4"/>
             </a:solidFill>
           </a:ln>
         </p:spPr>
@@ -4320,7 +4320,7 @@
             <a:r>
               <a:rPr sz="3000" b="1" i="0">
                 <a:solidFill>
-                  <a:srgbClr val="74591B"/>
+                  <a:srgbClr val="72591D"/>
                 </a:solidFill>
               </a:rPr>
               <a:t>돌잡이 이야기</a:t>
@@ -4345,11 +4345,11 @@
             </a:avLst>
           </a:prstGeom>
           <a:solidFill>
-            <a:srgbClr val="FBF7EE"/>
+            <a:srgbClr val="FCF9F3"/>
           </a:solidFill>
           <a:ln w="15875">
             <a:solidFill>
-              <a:srgbClr val="F5E9CC"/>
+              <a:srgbClr val="F7EDD4"/>
             </a:solidFill>
           </a:ln>
         </p:spPr>
@@ -4376,7 +4376,7 @@
             <a:avLst/>
           </a:prstGeom>
           <a:solidFill>
-            <a:srgbClr val="C6992F"/>
+            <a:srgbClr val="DFAD3A"/>
           </a:solidFill>
           <a:ln>
             <a:noFill/>
@@ -4434,7 +4434,7 @@
             <a:r>
               <a:rPr sz="1600" b="1" i="0">
                 <a:solidFill>
-                  <a:srgbClr val="74591B"/>
+                  <a:srgbClr val="72591D"/>
                 </a:solidFill>
               </a:rPr>
               <a:t>연필 · 공부</a:t>
@@ -4497,11 +4497,11 @@
             </a:avLst>
           </a:prstGeom>
           <a:solidFill>
-            <a:srgbClr val="FBF7EE"/>
+            <a:srgbClr val="FCF9F3"/>
           </a:solidFill>
           <a:ln w="15875">
             <a:solidFill>
-              <a:srgbClr val="F5E9CC"/>
+              <a:srgbClr val="F7EDD4"/>
             </a:solidFill>
           </a:ln>
         </p:spPr>
@@ -4528,7 +4528,7 @@
             <a:avLst/>
           </a:prstGeom>
           <a:solidFill>
-            <a:srgbClr val="C6992F"/>
+            <a:srgbClr val="DFAD3A"/>
           </a:solidFill>
           <a:ln>
             <a:noFill/>
@@ -4586,7 +4586,7 @@
             <a:r>
               <a:rPr sz="1600" b="1" i="0">
                 <a:solidFill>
-                  <a:srgbClr val="74591B"/>
+                  <a:srgbClr val="72591D"/>
                 </a:solidFill>
               </a:rPr>
               <a:t>실 · 장수</a:t>
@@ -4649,11 +4649,11 @@
             </a:avLst>
           </a:prstGeom>
           <a:solidFill>
-            <a:srgbClr val="FBF7EE"/>
+            <a:srgbClr val="FCF9F3"/>
           </a:solidFill>
           <a:ln w="15875">
             <a:solidFill>
-              <a:srgbClr val="F5E9CC"/>
+              <a:srgbClr val="F7EDD4"/>
             </a:solidFill>
           </a:ln>
         </p:spPr>
@@ -4680,7 +4680,7 @@
             <a:avLst/>
           </a:prstGeom>
           <a:solidFill>
-            <a:srgbClr val="C6992F"/>
+            <a:srgbClr val="DFAD3A"/>
           </a:solidFill>
           <a:ln>
             <a:noFill/>
@@ -4738,7 +4738,7 @@
             <a:r>
               <a:rPr sz="1600" b="1" i="0">
                 <a:solidFill>
-                  <a:srgbClr val="74591B"/>
+                  <a:srgbClr val="72591D"/>
                 </a:solidFill>
               </a:rPr>
               <a:t>돈 · 부</a:t>
@@ -4801,11 +4801,11 @@
             </a:avLst>
           </a:prstGeom>
           <a:solidFill>
-            <a:srgbClr val="FBF7EE"/>
+            <a:srgbClr val="FCF9F3"/>
           </a:solidFill>
           <a:ln w="15875">
             <a:solidFill>
-              <a:srgbClr val="F5E9CC"/>
+              <a:srgbClr val="F7EDD4"/>
             </a:solidFill>
           </a:ln>
         </p:spPr>
@@ -4832,7 +4832,7 @@
             <a:avLst/>
           </a:prstGeom>
           <a:solidFill>
-            <a:srgbClr val="C6992F"/>
+            <a:srgbClr val="DFAD3A"/>
           </a:solidFill>
           <a:ln>
             <a:noFill/>
@@ -4890,7 +4890,7 @@
             <a:r>
               <a:rPr sz="1600" b="1" i="0">
                 <a:solidFill>
-                  <a:srgbClr val="74591B"/>
+                  <a:srgbClr val="72591D"/>
                 </a:solidFill>
               </a:rPr>
               <a:t>마이크 · 인기</a:t>
@@ -4950,7 +4950,7 @@
     <p:bg>
       <p:bgPr>
         <a:solidFill>
-          <a:srgbClr val="FBF7EE"/>
+          <a:srgbClr val="FCF9F3"/>
         </a:solidFill>
         <a:effectLst/>
       </p:bgPr>
@@ -4979,7 +4979,7 @@
           <a:noFill/>
           <a:ln w="28575">
             <a:solidFill>
-              <a:srgbClr val="C6992F"/>
+              <a:srgbClr val="DFAD3A"/>
             </a:solidFill>
           </a:ln>
         </p:spPr>
@@ -5008,7 +5008,7 @@
           <a:noFill/>
           <a:ln w="9525">
             <a:solidFill>
-              <a:srgbClr val="F5E9CC"/>
+              <a:srgbClr val="F7EDD4"/>
             </a:solidFill>
           </a:ln>
         </p:spPr>
@@ -5050,7 +5050,7 @@
             <a:r>
               <a:rPr sz="3000" b="1" i="0">
                 <a:solidFill>
-                  <a:srgbClr val="74591B"/>
+                  <a:srgbClr val="72591D"/>
                 </a:solidFill>
               </a:rPr>
               <a:t>우리 아기의 선택은?</a:t>
@@ -5075,11 +5075,11 @@
             </a:avLst>
           </a:prstGeom>
           <a:solidFill>
-            <a:srgbClr val="F5E9CC"/>
+            <a:srgbClr val="F7EDD4"/>
           </a:solidFill>
           <a:ln w="19050">
             <a:solidFill>
-              <a:srgbClr val="C6992F"/>
+              <a:srgbClr val="DFAD3A"/>
             </a:solidFill>
             <a:prstDash val="dash"/>
           </a:ln>
@@ -5098,7 +5098,7 @@
             <a:r>
               <a:rPr sz="1400" b="0" i="0">
                 <a:solidFill>
-                  <a:srgbClr val="74591B"/>
+                  <a:srgbClr val="72591D"/>
                 </a:solidFill>
               </a:rPr>
               <a:t>돌잡이 사진</a:t>
@@ -5123,11 +5123,11 @@
             </a:avLst>
           </a:prstGeom>
           <a:solidFill>
-            <a:srgbClr val="FBF7EE"/>
+            <a:srgbClr val="FCF9F3"/>
           </a:solidFill>
           <a:ln w="12700">
             <a:solidFill>
-              <a:srgbClr val="F5E9CC"/>
+              <a:srgbClr val="F7EDD4"/>
             </a:solidFill>
           </a:ln>
         </p:spPr>
@@ -5251,7 +5251,7 @@
     <p:bg>
       <p:bgPr>
         <a:solidFill>
-          <a:srgbClr val="FBF7EE"/>
+          <a:srgbClr val="FCF9F3"/>
         </a:solidFill>
         <a:effectLst/>
       </p:bgPr>
@@ -5280,7 +5280,7 @@
           <a:noFill/>
           <a:ln w="28575">
             <a:solidFill>
-              <a:srgbClr val="C6992F"/>
+              <a:srgbClr val="DFAD3A"/>
             </a:solidFill>
           </a:ln>
         </p:spPr>
@@ -5309,7 +5309,7 @@
           <a:noFill/>
           <a:ln w="9525">
             <a:solidFill>
-              <a:srgbClr val="F5E9CC"/>
+              <a:srgbClr val="F7EDD4"/>
             </a:solidFill>
           </a:ln>
         </p:spPr>
@@ -5351,7 +5351,7 @@
             <a:r>
               <a:rPr sz="3000" b="1" i="0">
                 <a:solidFill>
-                  <a:srgbClr val="74591B"/>
+                  <a:srgbClr val="72591D"/>
                 </a:solidFill>
               </a:rPr>
               <a:t>사진 모음</a:t>
@@ -5376,11 +5376,11 @@
             </a:avLst>
           </a:prstGeom>
           <a:solidFill>
-            <a:srgbClr val="F5E9CC"/>
+            <a:srgbClr val="F7EDD4"/>
           </a:solidFill>
           <a:ln w="19050">
             <a:solidFill>
-              <a:srgbClr val="C6992F"/>
+              <a:srgbClr val="DFAD3A"/>
             </a:solidFill>
             <a:prstDash val="dash"/>
           </a:ln>
@@ -5399,7 +5399,7 @@
             <a:r>
               <a:rPr sz="1200" b="0" i="0">
                 <a:solidFill>
-                  <a:srgbClr val="74591B"/>
+                  <a:srgbClr val="72591D"/>
                 </a:solidFill>
               </a:rPr>
               <a:t>사진 1</a:t>
@@ -5424,11 +5424,11 @@
             </a:avLst>
           </a:prstGeom>
           <a:solidFill>
-            <a:srgbClr val="F5E9CC"/>
+            <a:srgbClr val="F7EDD4"/>
           </a:solidFill>
           <a:ln w="19050">
             <a:solidFill>
-              <a:srgbClr val="C6992F"/>
+              <a:srgbClr val="DFAD3A"/>
             </a:solidFill>
             <a:prstDash val="dash"/>
           </a:ln>
@@ -5447,7 +5447,7 @@
             <a:r>
               <a:rPr sz="1200" b="0" i="0">
                 <a:solidFill>
-                  <a:srgbClr val="74591B"/>
+                  <a:srgbClr val="72591D"/>
                 </a:solidFill>
               </a:rPr>
               <a:t>사진 2</a:t>
@@ -5472,11 +5472,11 @@
             </a:avLst>
           </a:prstGeom>
           <a:solidFill>
-            <a:srgbClr val="F5E9CC"/>
+            <a:srgbClr val="F7EDD4"/>
           </a:solidFill>
           <a:ln w="19050">
             <a:solidFill>
-              <a:srgbClr val="C6992F"/>
+              <a:srgbClr val="DFAD3A"/>
             </a:solidFill>
             <a:prstDash val="dash"/>
           </a:ln>
@@ -5495,7 +5495,7 @@
             <a:r>
               <a:rPr sz="1200" b="0" i="0">
                 <a:solidFill>
-                  <a:srgbClr val="74591B"/>
+                  <a:srgbClr val="72591D"/>
                 </a:solidFill>
               </a:rPr>
               <a:t>사진 3</a:t>
@@ -5520,11 +5520,11 @@
             </a:avLst>
           </a:prstGeom>
           <a:solidFill>
-            <a:srgbClr val="F5E9CC"/>
+            <a:srgbClr val="F7EDD4"/>
           </a:solidFill>
           <a:ln w="19050">
             <a:solidFill>
-              <a:srgbClr val="C6992F"/>
+              <a:srgbClr val="DFAD3A"/>
             </a:solidFill>
             <a:prstDash val="dash"/>
           </a:ln>
@@ -5543,7 +5543,7 @@
             <a:r>
               <a:rPr sz="1200" b="0" i="0">
                 <a:solidFill>
-                  <a:srgbClr val="74591B"/>
+                  <a:srgbClr val="72591D"/>
                 </a:solidFill>
               </a:rPr>
               <a:t>사진 4</a:t>
@@ -5568,11 +5568,11 @@
             </a:avLst>
           </a:prstGeom>
           <a:solidFill>
-            <a:srgbClr val="F5E9CC"/>
+            <a:srgbClr val="F7EDD4"/>
           </a:solidFill>
           <a:ln w="19050">
             <a:solidFill>
-              <a:srgbClr val="C6992F"/>
+              <a:srgbClr val="DFAD3A"/>
             </a:solidFill>
             <a:prstDash val="dash"/>
           </a:ln>
@@ -5591,7 +5591,7 @@
             <a:r>
               <a:rPr sz="1200" b="0" i="0">
                 <a:solidFill>
-                  <a:srgbClr val="74591B"/>
+                  <a:srgbClr val="72591D"/>
                 </a:solidFill>
               </a:rPr>
               <a:t>사진 5</a:t>
@@ -5616,11 +5616,11 @@
             </a:avLst>
           </a:prstGeom>
           <a:solidFill>
-            <a:srgbClr val="F5E9CC"/>
+            <a:srgbClr val="F7EDD4"/>
           </a:solidFill>
           <a:ln w="19050">
             <a:solidFill>
-              <a:srgbClr val="C6992F"/>
+              <a:srgbClr val="DFAD3A"/>
             </a:solidFill>
             <a:prstDash val="dash"/>
           </a:ln>
@@ -5639,7 +5639,7 @@
             <a:r>
               <a:rPr sz="1200" b="0" i="0">
                 <a:solidFill>
-                  <a:srgbClr val="74591B"/>
+                  <a:srgbClr val="72591D"/>
                 </a:solidFill>
               </a:rPr>
               <a:t>사진 6</a:t>
@@ -5664,11 +5664,11 @@
             </a:avLst>
           </a:prstGeom>
           <a:solidFill>
-            <a:srgbClr val="F5E9CC"/>
+            <a:srgbClr val="F7EDD4"/>
           </a:solidFill>
           <a:ln w="19050">
             <a:solidFill>
-              <a:srgbClr val="C6992F"/>
+              <a:srgbClr val="DFAD3A"/>
             </a:solidFill>
             <a:prstDash val="dash"/>
           </a:ln>
@@ -5687,7 +5687,7 @@
             <a:r>
               <a:rPr sz="1200" b="0" i="0">
                 <a:solidFill>
-                  <a:srgbClr val="74591B"/>
+                  <a:srgbClr val="72591D"/>
                 </a:solidFill>
               </a:rPr>
               <a:t>사진 7</a:t>
@@ -5712,11 +5712,11 @@
             </a:avLst>
           </a:prstGeom>
           <a:solidFill>
-            <a:srgbClr val="F5E9CC"/>
+            <a:srgbClr val="F7EDD4"/>
           </a:solidFill>
           <a:ln w="19050">
             <a:solidFill>
-              <a:srgbClr val="C6992F"/>
+              <a:srgbClr val="DFAD3A"/>
             </a:solidFill>
             <a:prstDash val="dash"/>
           </a:ln>
@@ -5735,7 +5735,7 @@
             <a:r>
               <a:rPr sz="1200" b="0" i="0">
                 <a:solidFill>
-                  <a:srgbClr val="74591B"/>
+                  <a:srgbClr val="72591D"/>
                 </a:solidFill>
               </a:rPr>
               <a:t>사진 8</a:t>
@@ -5815,7 +5815,7 @@
             <a:r>
               <a:rPr sz="3400" b="1" i="0">
                 <a:solidFill>
-                  <a:srgbClr val="74591B"/>
+                  <a:srgbClr val="72591D"/>
                 </a:solidFill>
               </a:rPr>
               <a:t>와 주셔서 고맙습니다</a:t>
@@ -5853,7 +5853,7 @@
             <a:r>
               <a:rPr sz="1700" b="0" i="1">
                 <a:solidFill>
-                  <a:srgbClr val="74591B"/>
+                  <a:srgbClr val="72591D"/>
                 </a:solidFill>
               </a:rPr>
               <a:t>아이가 한 살이 되었습니다</a:t>
@@ -5918,34 +5918,34 @@
         <a:sysClr val="window" lastClr="FFFFFF"/>
       </a:lt1>
       <a:dk2>
-        <a:srgbClr val="74591B"/>
+        <a:srgbClr val="72591D"/>
       </a:dk2>
       <a:lt2>
-        <a:srgbClr val="FBF7EE"/>
+        <a:srgbClr val="FCF9F3"/>
       </a:lt2>
       <a:accent1>
-        <a:srgbClr val="C6992F"/>
+        <a:srgbClr val="DFAD3A"/>
       </a:accent1>
       <a:accent2>
-        <a:srgbClr val="3B8091"/>
+        <a:srgbClr val="339941"/>
       </a:accent2>
       <a:accent3>
-        <a:srgbClr val="74591B"/>
+        <a:srgbClr val="72591D"/>
       </a:accent3>
       <a:accent4>
-        <a:srgbClr val="F5E9CC"/>
+        <a:srgbClr val="F7EDD4"/>
       </a:accent4>
       <a:accent5>
-        <a:srgbClr val="808C60"/>
+        <a:srgbClr val="89A33E"/>
       </a:accent5>
       <a:accent6>
-        <a:srgbClr val="AC9B76"/>
+        <a:srgbClr val="AA9B77"/>
       </a:accent6>
       <a:hlink>
-        <a:srgbClr val="C6992F"/>
+        <a:srgbClr val="DFAD3A"/>
       </a:hlink>
       <a:folHlink>
-        <a:srgbClr val="74591B"/>
+        <a:srgbClr val="72591D"/>
       </a:folHlink>
     </a:clrScheme>
     <a:fontScheme name="Office">
